--- a/e2e/fixtures/chart-gallery.pptx
+++ b/e2e/fixtures/chart-gallery.pptx
@@ -3582,8 +3582,8 @@
         </p:nvSpPr>
         <p:spPr>
           <a:xfrm>
-            <a:off x="0" y="0"/>
-            <a:ext cx="9525" cy="9525"/>
+            <a:off x="0" y="4762500"/>
+            <a:ext cx="3048000" cy="285750"/>
           </a:xfrm>
           <a:prstGeom prst="rect">
             <a:avLst/>
@@ -3646,14 +3646,14 @@
       </p:grpSpPr>
       <p:sp>
         <p:nvSpPr>
-          <p:cNvPr id="10" name="Rectangle 10"/>
+          <p:cNvPr id="2" name="Rectangle 10"/>
           <p:cNvSpPr txBox="0"/>
           <p:nvPr/>
         </p:nvSpPr>
         <p:spPr>
           <a:xfrm>
-            <a:off x="0" y="0"/>
-            <a:ext cx="9525" cy="9525"/>
+            <a:off x="0" y="4762500"/>
+            <a:ext cx="3048000" cy="285750"/>
           </a:xfrm>
           <a:prstGeom prst="rect">
             <a:avLst/>
@@ -3716,14 +3716,14 @@
       </p:grpSpPr>
       <p:sp>
         <p:nvSpPr>
-          <p:cNvPr id="11" name="Rectangle 11"/>
+          <p:cNvPr id="2" name="Rectangle 11"/>
           <p:cNvSpPr txBox="0"/>
           <p:nvPr/>
         </p:nvSpPr>
         <p:spPr>
           <a:xfrm>
-            <a:off x="0" y="0"/>
-            <a:ext cx="9525" cy="9525"/>
+            <a:off x="0" y="4762500"/>
+            <a:ext cx="3048000" cy="285750"/>
           </a:xfrm>
           <a:prstGeom prst="rect">
             <a:avLst/>
@@ -3786,14 +3786,14 @@
       </p:grpSpPr>
       <p:sp>
         <p:nvSpPr>
-          <p:cNvPr id="12" name="Rectangle 12"/>
+          <p:cNvPr id="2" name="Rectangle 12"/>
           <p:cNvSpPr txBox="0"/>
           <p:nvPr/>
         </p:nvSpPr>
         <p:spPr>
           <a:xfrm>
-            <a:off x="0" y="0"/>
-            <a:ext cx="9525" cy="9525"/>
+            <a:off x="0" y="4762500"/>
+            <a:ext cx="3048000" cy="285750"/>
           </a:xfrm>
           <a:prstGeom prst="rect">
             <a:avLst/>
@@ -3856,14 +3856,14 @@
       </p:grpSpPr>
       <p:sp>
         <p:nvSpPr>
-          <p:cNvPr id="13" name="Rectangle 13"/>
+          <p:cNvPr id="2" name="Rectangle 13"/>
           <p:cNvSpPr txBox="0"/>
           <p:nvPr/>
         </p:nvSpPr>
         <p:spPr>
           <a:xfrm>
-            <a:off x="0" y="0"/>
-            <a:ext cx="9525" cy="9525"/>
+            <a:off x="0" y="4762500"/>
+            <a:ext cx="3048000" cy="285750"/>
           </a:xfrm>
           <a:prstGeom prst="rect">
             <a:avLst/>
@@ -3926,14 +3926,14 @@
       </p:grpSpPr>
       <p:sp>
         <p:nvSpPr>
-          <p:cNvPr id="14" name="Rectangle 14"/>
+          <p:cNvPr id="2" name="Rectangle 14"/>
           <p:cNvSpPr txBox="0"/>
           <p:nvPr/>
         </p:nvSpPr>
         <p:spPr>
           <a:xfrm>
-            <a:off x="0" y="0"/>
-            <a:ext cx="9525" cy="9525"/>
+            <a:off x="0" y="4762500"/>
+            <a:ext cx="3048000" cy="285750"/>
           </a:xfrm>
           <a:prstGeom prst="rect">
             <a:avLst/>
@@ -3996,14 +3996,14 @@
       </p:grpSpPr>
       <p:sp>
         <p:nvSpPr>
-          <p:cNvPr id="15" name="Rectangle 15"/>
+          <p:cNvPr id="2" name="Rectangle 15"/>
           <p:cNvSpPr txBox="0"/>
           <p:nvPr/>
         </p:nvSpPr>
         <p:spPr>
           <a:xfrm>
-            <a:off x="0" y="0"/>
-            <a:ext cx="9525" cy="9525"/>
+            <a:off x="0" y="4762500"/>
+            <a:ext cx="3048000" cy="285750"/>
           </a:xfrm>
           <a:prstGeom prst="rect">
             <a:avLst/>
@@ -4066,14 +4066,14 @@
       </p:grpSpPr>
       <p:sp>
         <p:nvSpPr>
-          <p:cNvPr id="16" name="Rectangle 16"/>
+          <p:cNvPr id="2" name="Rectangle 16"/>
           <p:cNvSpPr txBox="0"/>
           <p:nvPr/>
         </p:nvSpPr>
         <p:spPr>
           <a:xfrm>
-            <a:off x="0" y="0"/>
-            <a:ext cx="9525" cy="9525"/>
+            <a:off x="0" y="4762500"/>
+            <a:ext cx="3048000" cy="285750"/>
           </a:xfrm>
           <a:prstGeom prst="rect">
             <a:avLst/>
@@ -4136,14 +4136,14 @@
       </p:grpSpPr>
       <p:sp>
         <p:nvSpPr>
-          <p:cNvPr id="17" name="Rectangle 17"/>
+          <p:cNvPr id="2" name="Rectangle 17"/>
           <p:cNvSpPr txBox="0"/>
           <p:nvPr/>
         </p:nvSpPr>
         <p:spPr>
           <a:xfrm>
-            <a:off x="0" y="0"/>
-            <a:ext cx="9525" cy="9525"/>
+            <a:off x="0" y="4762500"/>
+            <a:ext cx="3048000" cy="285750"/>
           </a:xfrm>
           <a:prstGeom prst="rect">
             <a:avLst/>
@@ -4206,14 +4206,14 @@
       </p:grpSpPr>
       <p:sp>
         <p:nvSpPr>
-          <p:cNvPr id="18" name="Rectangle 18"/>
+          <p:cNvPr id="2" name="Rectangle 18"/>
           <p:cNvSpPr txBox="0"/>
           <p:nvPr/>
         </p:nvSpPr>
         <p:spPr>
           <a:xfrm>
-            <a:off x="0" y="0"/>
-            <a:ext cx="9525" cy="9525"/>
+            <a:off x="0" y="4762500"/>
+            <a:ext cx="3048000" cy="285750"/>
           </a:xfrm>
           <a:prstGeom prst="rect">
             <a:avLst/>
@@ -4276,14 +4276,14 @@
       </p:grpSpPr>
       <p:sp>
         <p:nvSpPr>
-          <p:cNvPr id="19" name="Rectangle 19"/>
+          <p:cNvPr id="2" name="Rectangle 19"/>
           <p:cNvSpPr txBox="0"/>
           <p:nvPr/>
         </p:nvSpPr>
         <p:spPr>
           <a:xfrm>
-            <a:off x="0" y="0"/>
-            <a:ext cx="9525" cy="9525"/>
+            <a:off x="0" y="4762500"/>
+            <a:ext cx="3048000" cy="285750"/>
           </a:xfrm>
           <a:prstGeom prst="rect">
             <a:avLst/>
@@ -4352,8 +4352,8 @@
         </p:nvSpPr>
         <p:spPr>
           <a:xfrm>
-            <a:off x="0" y="0"/>
-            <a:ext cx="9525" cy="9525"/>
+            <a:off x="0" y="4762500"/>
+            <a:ext cx="3048000" cy="285750"/>
           </a:xfrm>
           <a:prstGeom prst="rect">
             <a:avLst/>
@@ -4416,14 +4416,14 @@
       </p:grpSpPr>
       <p:sp>
         <p:nvSpPr>
-          <p:cNvPr id="20" name="Rectangle 20"/>
+          <p:cNvPr id="2" name="Rectangle 20"/>
           <p:cNvSpPr txBox="0"/>
           <p:nvPr/>
         </p:nvSpPr>
         <p:spPr>
           <a:xfrm>
-            <a:off x="0" y="0"/>
-            <a:ext cx="9525" cy="9525"/>
+            <a:off x="0" y="4762500"/>
+            <a:ext cx="3048000" cy="285750"/>
           </a:xfrm>
           <a:prstGeom prst="rect">
             <a:avLst/>
@@ -4486,14 +4486,14 @@
       </p:grpSpPr>
       <p:sp>
         <p:nvSpPr>
-          <p:cNvPr id="3" name="Rectangle 3"/>
+          <p:cNvPr id="2" name="Rectangle 3"/>
           <p:cNvSpPr txBox="0"/>
           <p:nvPr/>
         </p:nvSpPr>
         <p:spPr>
           <a:xfrm>
-            <a:off x="0" y="0"/>
-            <a:ext cx="9525" cy="9525"/>
+            <a:off x="0" y="4762500"/>
+            <a:ext cx="3048000" cy="285750"/>
           </a:xfrm>
           <a:prstGeom prst="rect">
             <a:avLst/>
@@ -4556,14 +4556,14 @@
       </p:grpSpPr>
       <p:sp>
         <p:nvSpPr>
-          <p:cNvPr id="4" name="Rectangle 4"/>
+          <p:cNvPr id="2" name="Rectangle 4"/>
           <p:cNvSpPr txBox="0"/>
           <p:nvPr/>
         </p:nvSpPr>
         <p:spPr>
           <a:xfrm>
-            <a:off x="0" y="0"/>
-            <a:ext cx="9525" cy="9525"/>
+            <a:off x="0" y="4762500"/>
+            <a:ext cx="3048000" cy="285750"/>
           </a:xfrm>
           <a:prstGeom prst="rect">
             <a:avLst/>
@@ -4626,14 +4626,14 @@
       </p:grpSpPr>
       <p:sp>
         <p:nvSpPr>
-          <p:cNvPr id="5" name="Rectangle 5"/>
+          <p:cNvPr id="2" name="Rectangle 5"/>
           <p:cNvSpPr txBox="0"/>
           <p:nvPr/>
         </p:nvSpPr>
         <p:spPr>
           <a:xfrm>
-            <a:off x="0" y="0"/>
-            <a:ext cx="9525" cy="9525"/>
+            <a:off x="0" y="4762500"/>
+            <a:ext cx="3048000" cy="285750"/>
           </a:xfrm>
           <a:prstGeom prst="rect">
             <a:avLst/>
@@ -4696,14 +4696,14 @@
       </p:grpSpPr>
       <p:sp>
         <p:nvSpPr>
-          <p:cNvPr id="6" name="Rectangle 6"/>
+          <p:cNvPr id="2" name="Rectangle 6"/>
           <p:cNvSpPr txBox="0"/>
           <p:nvPr/>
         </p:nvSpPr>
         <p:spPr>
           <a:xfrm>
-            <a:off x="0" y="0"/>
-            <a:ext cx="9525" cy="9525"/>
+            <a:off x="0" y="4762500"/>
+            <a:ext cx="3048000" cy="285750"/>
           </a:xfrm>
           <a:prstGeom prst="rect">
             <a:avLst/>
@@ -4766,14 +4766,14 @@
       </p:grpSpPr>
       <p:sp>
         <p:nvSpPr>
-          <p:cNvPr id="7" name="Rectangle 7"/>
+          <p:cNvPr id="2" name="Rectangle 7"/>
           <p:cNvSpPr txBox="0"/>
           <p:nvPr/>
         </p:nvSpPr>
         <p:spPr>
           <a:xfrm>
-            <a:off x="0" y="0"/>
-            <a:ext cx="9525" cy="9525"/>
+            <a:off x="0" y="4762500"/>
+            <a:ext cx="3048000" cy="285750"/>
           </a:xfrm>
           <a:prstGeom prst="rect">
             <a:avLst/>
@@ -4836,14 +4836,14 @@
       </p:grpSpPr>
       <p:sp>
         <p:nvSpPr>
-          <p:cNvPr id="8" name="Rectangle 8"/>
+          <p:cNvPr id="2" name="Rectangle 8"/>
           <p:cNvSpPr txBox="0"/>
           <p:nvPr/>
         </p:nvSpPr>
         <p:spPr>
           <a:xfrm>
-            <a:off x="0" y="0"/>
-            <a:ext cx="9525" cy="9525"/>
+            <a:off x="0" y="4762500"/>
+            <a:ext cx="3048000" cy="285750"/>
           </a:xfrm>
           <a:prstGeom prst="rect">
             <a:avLst/>
@@ -4906,14 +4906,14 @@
       </p:grpSpPr>
       <p:sp>
         <p:nvSpPr>
-          <p:cNvPr id="9" name="Rectangle 9"/>
+          <p:cNvPr id="2" name="Rectangle 9"/>
           <p:cNvSpPr txBox="0"/>
           <p:nvPr/>
         </p:nvSpPr>
         <p:spPr>
           <a:xfrm>
-            <a:off x="0" y="0"/>
-            <a:ext cx="9525" cy="9525"/>
+            <a:off x="0" y="4762500"/>
+            <a:ext cx="3048000" cy="285750"/>
           </a:xfrm>
           <a:prstGeom prst="rect">
             <a:avLst/>

--- a/e2e/fixtures/chart-gallery.pptx
+++ b/e2e/fixtures/chart-gallery.pptx
@@ -679,10 +679,10 @@
       <cx:strDim type="cat">
         <cx:f>Sheet1!$A$2:$A$5</cx:f>
         <cx:lvl ptCount="4">
-          <cx:pt idx="0">Q1</cx:pt>
-          <cx:pt idx="1">Q2</cx:pt>
-          <cx:pt idx="2">Q3</cx:pt>
-          <cx:pt idx="3">Q4</cx:pt>
+          <cx:pt idx="0">Group A</cx:pt>
+          <cx:pt idx="1">Group A</cx:pt>
+          <cx:pt idx="2">Group B</cx:pt>
+          <cx:pt idx="3">Group B</cx:pt>
         </cx:lvl>
       </cx:strDim>
       <cx:numDim type="val">
@@ -699,10 +699,10 @@
       <cx:strDim type="cat">
         <cx:f>Sheet1!$A$2:$A$5</cx:f>
         <cx:lvl ptCount="4">
-          <cx:pt idx="0">Q1</cx:pt>
-          <cx:pt idx="1">Q2</cx:pt>
-          <cx:pt idx="2">Q3</cx:pt>
-          <cx:pt idx="3">Q4</cx:pt>
+          <cx:pt idx="0">Group A</cx:pt>
+          <cx:pt idx="1">Group A</cx:pt>
+          <cx:pt idx="2">Group B</cx:pt>
+          <cx:pt idx="3">Group B</cx:pt>
         </cx:lvl>
       </cx:strDim>
       <cx:numDim type="val">
@@ -719,10 +719,10 @@
       <cx:strDim type="cat">
         <cx:f>Sheet1!$A$2:$A$5</cx:f>
         <cx:lvl ptCount="4">
-          <cx:pt idx="0">Q1</cx:pt>
-          <cx:pt idx="1">Q2</cx:pt>
-          <cx:pt idx="2">Q3</cx:pt>
-          <cx:pt idx="3">Q4</cx:pt>
+          <cx:pt idx="0">Group A</cx:pt>
+          <cx:pt idx="1">Group A</cx:pt>
+          <cx:pt idx="2">Group B</cx:pt>
+          <cx:pt idx="3">Group B</cx:pt>
         </cx:lvl>
       </cx:strDim>
       <cx:numDim type="val">
@@ -3594,12 +3594,10 @@
           <a:bodyPr wrap="square"/>
           <a:lstStyle/>
           <a:p>
-            <a:pPr/>
             <a:r>
               <a:rPr lang="en-US" dirty="0"/>
               <a:t>Clustered Bar</a:t>
             </a:r>
-            <a:endParaRPr lang="en-US"/>
           </a:p>
         </p:txBody>
       </p:sp>
@@ -3664,12 +3662,10 @@
           <a:bodyPr wrap="square"/>
           <a:lstStyle/>
           <a:p>
-            <a:pPr/>
             <a:r>
               <a:rPr lang="en-US" dirty="0"/>
               <a:t>Percent Stacked Bar</a:t>
             </a:r>
-            <a:endParaRPr lang="en-US"/>
           </a:p>
         </p:txBody>
       </p:sp>
@@ -3734,12 +3730,10 @@
           <a:bodyPr wrap="square"/>
           <a:lstStyle/>
           <a:p>
-            <a:pPr/>
             <a:r>
               <a:rPr lang="en-US" dirty="0"/>
               <a:t>Funnel</a:t>
             </a:r>
-            <a:endParaRPr lang="en-US"/>
           </a:p>
         </p:txBody>
       </p:sp>
@@ -3804,12 +3798,10 @@
           <a:bodyPr wrap="square"/>
           <a:lstStyle/>
           <a:p>
-            <a:pPr/>
             <a:r>
               <a:rPr lang="en-US" dirty="0"/>
               <a:t>Sunburst</a:t>
             </a:r>
-            <a:endParaRPr lang="en-US"/>
           </a:p>
         </p:txBody>
       </p:sp>
@@ -3874,12 +3866,10 @@
           <a:bodyPr wrap="square"/>
           <a:lstStyle/>
           <a:p>
-            <a:pPr/>
             <a:r>
               <a:rPr lang="en-US" dirty="0"/>
               <a:t>Histogram</a:t>
             </a:r>
-            <a:endParaRPr lang="en-US"/>
           </a:p>
         </p:txBody>
       </p:sp>
@@ -3944,12 +3934,10 @@
           <a:bodyPr wrap="square"/>
           <a:lstStyle/>
           <a:p>
-            <a:pPr/>
             <a:r>
               <a:rPr lang="en-US" dirty="0"/>
               <a:t>Box-Whisker</a:t>
             </a:r>
-            <a:endParaRPr lang="en-US"/>
           </a:p>
         </p:txBody>
       </p:sp>
@@ -4014,12 +4002,10 @@
           <a:bodyPr wrap="square"/>
           <a:lstStyle/>
           <a:p>
-            <a:pPr/>
             <a:r>
               <a:rPr lang="en-US" dirty="0"/>
               <a:t>Combo</a:t>
             </a:r>
-            <a:endParaRPr lang="en-US"/>
           </a:p>
         </p:txBody>
       </p:sp>
@@ -4084,12 +4070,10 @@
           <a:bodyPr wrap="square"/>
           <a:lstStyle/>
           <a:p>
-            <a:pPr/>
             <a:r>
               <a:rPr lang="en-US" dirty="0"/>
               <a:t>Stock</a:t>
             </a:r>
-            <a:endParaRPr lang="en-US"/>
           </a:p>
         </p:txBody>
       </p:sp>
@@ -4154,12 +4138,10 @@
           <a:bodyPr wrap="square"/>
           <a:lstStyle/>
           <a:p>
-            <a:pPr/>
             <a:r>
               <a:rPr lang="en-US" dirty="0"/>
               <a:t>Surface</a:t>
             </a:r>
-            <a:endParaRPr lang="en-US"/>
           </a:p>
         </p:txBody>
       </p:sp>
@@ -4224,12 +4206,10 @@
           <a:bodyPr wrap="square"/>
           <a:lstStyle/>
           <a:p>
-            <a:pPr/>
             <a:r>
               <a:rPr lang="en-US" dirty="0"/>
               <a:t>Waterfall</a:t>
             </a:r>
-            <a:endParaRPr lang="en-US"/>
           </a:p>
         </p:txBody>
       </p:sp>
@@ -4294,12 +4274,10 @@
           <a:bodyPr wrap="square"/>
           <a:lstStyle/>
           <a:p>
-            <a:pPr/>
             <a:r>
               <a:rPr lang="en-US" dirty="0"/>
               <a:t>Treemap</a:t>
             </a:r>
-            <a:endParaRPr lang="en-US"/>
           </a:p>
         </p:txBody>
       </p:sp>
@@ -4364,12 +4342,10 @@
           <a:bodyPr wrap="square"/>
           <a:lstStyle/>
           <a:p>
-            <a:pPr/>
             <a:r>
               <a:rPr lang="en-US" dirty="0"/>
               <a:t>Line (with trendline)</a:t>
             </a:r>
-            <a:endParaRPr lang="en-US"/>
           </a:p>
         </p:txBody>
       </p:sp>
@@ -4434,12 +4410,10 @@
           <a:bodyPr wrap="square"/>
           <a:lstStyle/>
           <a:p>
-            <a:pPr/>
             <a:r>
               <a:rPr lang="en-US" dirty="0"/>
               <a:t>Region Map</a:t>
             </a:r>
-            <a:endParaRPr lang="en-US"/>
           </a:p>
         </p:txBody>
       </p:sp>
@@ -4504,12 +4478,10 @@
           <a:bodyPr wrap="square"/>
           <a:lstStyle/>
           <a:p>
-            <a:pPr/>
             <a:r>
               <a:rPr lang="en-US" dirty="0"/>
               <a:t>Area</a:t>
             </a:r>
-            <a:endParaRPr lang="en-US"/>
           </a:p>
         </p:txBody>
       </p:sp>
@@ -4574,12 +4546,10 @@
           <a:bodyPr wrap="square"/>
           <a:lstStyle/>
           <a:p>
-            <a:pPr/>
             <a:r>
               <a:rPr lang="en-US" dirty="0"/>
               <a:t>Pie</a:t>
             </a:r>
-            <a:endParaRPr lang="en-US"/>
           </a:p>
         </p:txBody>
       </p:sp>
@@ -4644,12 +4614,10 @@
           <a:bodyPr wrap="square"/>
           <a:lstStyle/>
           <a:p>
-            <a:pPr/>
             <a:r>
               <a:rPr lang="en-US" dirty="0"/>
               <a:t>Doughnut</a:t>
             </a:r>
-            <a:endParaRPr lang="en-US"/>
           </a:p>
         </p:txBody>
       </p:sp>
@@ -4714,12 +4682,10 @@
           <a:bodyPr wrap="square"/>
           <a:lstStyle/>
           <a:p>
-            <a:pPr/>
             <a:r>
               <a:rPr lang="en-US" dirty="0"/>
               <a:t>Radar</a:t>
             </a:r>
-            <a:endParaRPr lang="en-US"/>
           </a:p>
         </p:txBody>
       </p:sp>
@@ -4784,12 +4750,10 @@
           <a:bodyPr wrap="square"/>
           <a:lstStyle/>
           <a:p>
-            <a:pPr/>
             <a:r>
               <a:rPr lang="en-US" dirty="0"/>
               <a:t>Scatter</a:t>
             </a:r>
-            <a:endParaRPr lang="en-US"/>
           </a:p>
         </p:txBody>
       </p:sp>
@@ -4854,12 +4818,10 @@
           <a:bodyPr wrap="square"/>
           <a:lstStyle/>
           <a:p>
-            <a:pPr/>
             <a:r>
               <a:rPr lang="en-US" dirty="0"/>
               <a:t>Bubble</a:t>
             </a:r>
-            <a:endParaRPr lang="en-US"/>
           </a:p>
         </p:txBody>
       </p:sp>
@@ -4924,12 +4886,10 @@
           <a:bodyPr wrap="square"/>
           <a:lstStyle/>
           <a:p>
-            <a:pPr/>
             <a:r>
               <a:rPr lang="en-US" dirty="0"/>
               <a:t>Stacked Bar</a:t>
             </a:r>
-            <a:endParaRPr lang="en-US"/>
           </a:p>
         </p:txBody>
       </p:sp>
